--- a/generated/Tier 1 Broker Scorecards/Rpk Professional Group LLC_Broker_Scorecard.pptx
+++ b/generated/Tier 1 Broker Scorecards/Rpk Professional Group LLC_Broker_Scorecard.pptx
@@ -3394,7 +3394,7 @@
                         <a:rPr sz="900">
                           <a:latin typeface="Segoe UI"/>
                         </a:rPr>
-                        <a:t>Tier 1  |  2.07% / 15.00%</a:t>
+                        <a:t>Tier 1  |  1.55% / 15.00%</a:t>
                       </a:r>
                     </a:p>
                   </a:txBody>
@@ -3766,7 +3766,7 @@
                         <a:rPr sz="900">
                           <a:latin typeface="Segoe UI"/>
                         </a:rPr>
-                        <a:t>Non-Fleet Subs: 181  |  Binds: 4</a:t>
+                        <a:t>Non-Fleet Subs: 182  |  Binds: 3</a:t>
                       </a:r>
                     </a:p>
                   </a:txBody>
@@ -4428,7 +4428,7 @@
                           </a:solidFill>
                           <a:latin typeface="Segoe UI"/>
                         </a:rPr>
-                        <a:t>26</a:t>
+                        <a:t>28</a:t>
                       </a:r>
                     </a:p>
                   </a:txBody>

--- a/generated/Tier 1 Broker Scorecards/Rpk Professional Group LLC_Broker_Scorecard.pptx
+++ b/generated/Tier 1 Broker Scorecards/Rpk Professional Group LLC_Broker_Scorecard.pptx
@@ -3357,7 +3357,7 @@
                         <a:rPr sz="800">
                           <a:latin typeface="Segoe UI"/>
                         </a:rPr>
-                        <a:t>$1,332,358.07 / $1,107,955.52 / $129,071.05</a:t>
+                        <a:t>$1,332,358.07 / $1,126,768.34 / $147,883.87</a:t>
                       </a:r>
                     </a:p>
                   </a:txBody>
@@ -3394,7 +3394,7 @@
                         <a:rPr sz="900">
                           <a:latin typeface="Segoe UI"/>
                         </a:rPr>
-                        <a:t>Tier 1  |  1.55% / 15.00%</a:t>
+                        <a:t>Tier 1  |  2.04% / 15.00%</a:t>
                       </a:r>
                     </a:p>
                   </a:txBody>
@@ -3431,7 +3431,7 @@
                         <a:rPr sz="900">
                           <a:latin typeface="Segoe UI"/>
                         </a:rPr>
-                        <a:t>$1,865,301.30  (6.9% achieved)</a:t>
+                        <a:t>$1,865,301.30  (7.9% achieved)</a:t>
                       </a:r>
                     </a:p>
                   </a:txBody>
@@ -3653,7 +3653,7 @@
                         <a:rPr sz="900">
                           <a:latin typeface="Segoe UI"/>
                         </a:rPr>
-                        <a:t>Fleet Subs: 12  |  Binds: 0</a:t>
+                        <a:t>Fleet Subs: 13  |  Binds: 0</a:t>
                       </a:r>
                     </a:p>
                   </a:txBody>
@@ -3766,7 +3766,7 @@
                         <a:rPr sz="900">
                           <a:latin typeface="Segoe UI"/>
                         </a:rPr>
-                        <a:t>Non-Fleet Subs: 182  |  Binds: 3</a:t>
+                        <a:t>Non-Fleet Subs: 183  |  Binds: 4</a:t>
                       </a:r>
                     </a:p>
                   </a:txBody>
@@ -3803,7 +3803,7 @@
                         <a:rPr sz="900">
                           <a:latin typeface="Segoe UI"/>
                         </a:rPr>
-                        <a:t>Non-Fleet Bound Premium: $129,071.05</a:t>
+                        <a:t>Non-Fleet Bound Premium: $147,883.87</a:t>
                       </a:r>
                     </a:p>
                   </a:txBody>
@@ -4428,7 +4428,7 @@
                           </a:solidFill>
                           <a:latin typeface="Segoe UI"/>
                         </a:rPr>
-                        <a:t>28</a:t>
+                        <a:t>30</a:t>
                       </a:r>
                     </a:p>
                   </a:txBody>
@@ -5250,10 +5250,13 @@
                     <a:p>
                       <a:pPr algn="ctr"/>
                       <a:r>
-                        <a:rPr sz="800">
+                        <a:rPr sz="800" b="1">
+                          <a:solidFill>
+                            <a:srgbClr val="DC2626"/>
+                          </a:solidFill>
                           <a:latin typeface="Segoe UI"/>
                         </a:rPr>
-                        <a:t/>
+                        <a:t>$17.6K</a:t>
                       </a:r>
                     </a:p>
                   </a:txBody>

--- a/generated/Tier 1 Broker Scorecards/Rpk Professional Group LLC_Broker_Scorecard.pptx
+++ b/generated/Tier 1 Broker Scorecards/Rpk Professional Group LLC_Broker_Scorecard.pptx
@@ -3394,7 +3394,7 @@
                         <a:rPr sz="900">
                           <a:latin typeface="Segoe UI"/>
                         </a:rPr>
-                        <a:t>Tier 1  |  2.04% / 15.00%</a:t>
+                        <a:t>Tier 1  |  2.00% / 15.00%</a:t>
                       </a:r>
                     </a:p>
                   </a:txBody>
@@ -3766,7 +3766,7 @@
                         <a:rPr sz="900">
                           <a:latin typeface="Segoe UI"/>
                         </a:rPr>
-                        <a:t>Non-Fleet Subs: 183  |  Binds: 4</a:t>
+                        <a:t>Non-Fleet Subs: 187  |  Binds: 4</a:t>
                       </a:r>
                     </a:p>
                   </a:txBody>
@@ -4428,7 +4428,7 @@
                           </a:solidFill>
                           <a:latin typeface="Segoe UI"/>
                         </a:rPr>
-                        <a:t>30</a:t>
+                        <a:t>34</a:t>
                       </a:r>
                     </a:p>
                   </a:txBody>

--- a/generated/Tier 1 Broker Scorecards/Rpk Professional Group LLC_Broker_Scorecard.pptx
+++ b/generated/Tier 1 Broker Scorecards/Rpk Professional Group LLC_Broker_Scorecard.pptx
@@ -3394,7 +3394,7 @@
                         <a:rPr sz="900">
                           <a:latin typeface="Segoe UI"/>
                         </a:rPr>
-                        <a:t>Tier 1  |  2.00% / 15.00%</a:t>
+                        <a:t>Tier 1  |  1.98% / 15.00%</a:t>
                       </a:r>
                     </a:p>
                   </a:txBody>
@@ -3766,7 +3766,7 @@
                         <a:rPr sz="900">
                           <a:latin typeface="Segoe UI"/>
                         </a:rPr>
-                        <a:t>Non-Fleet Subs: 187  |  Binds: 4</a:t>
+                        <a:t>Non-Fleet Subs: 189  |  Binds: 4</a:t>
                       </a:r>
                     </a:p>
                   </a:txBody>
@@ -4428,7 +4428,7 @@
                           </a:solidFill>
                           <a:latin typeface="Segoe UI"/>
                         </a:rPr>
-                        <a:t>34</a:t>
+                        <a:t>36</a:t>
                       </a:r>
                     </a:p>
                   </a:txBody>

--- a/generated/Tier 1 Broker Scorecards/Rpk Professional Group LLC_Broker_Scorecard.pptx
+++ b/generated/Tier 1 Broker Scorecards/Rpk Professional Group LLC_Broker_Scorecard.pptx
@@ -3394,7 +3394,7 @@
                         <a:rPr sz="900">
                           <a:latin typeface="Segoe UI"/>
                         </a:rPr>
-                        <a:t>Tier 1  |  1.98% / 15.00%</a:t>
+                        <a:t>Tier 1  |  1.96% / 15.00%</a:t>
                       </a:r>
                     </a:p>
                   </a:txBody>
@@ -3766,7 +3766,7 @@
                         <a:rPr sz="900">
                           <a:latin typeface="Segoe UI"/>
                         </a:rPr>
-                        <a:t>Non-Fleet Subs: 189  |  Binds: 4</a:t>
+                        <a:t>Non-Fleet Subs: 191  |  Binds: 4</a:t>
                       </a:r>
                     </a:p>
                   </a:txBody>
@@ -4424,11 +4424,11 @@
                       <a:r>
                         <a:rPr sz="800">
                           <a:solidFill>
-                            <a:srgbClr val="DC2626"/>
+                            <a:srgbClr val="059669"/>
                           </a:solidFill>
                           <a:latin typeface="Segoe UI"/>
                         </a:rPr>
-                        <a:t>36</a:t>
+                        <a:t>38</a:t>
                       </a:r>
                     </a:p>
                   </a:txBody>

--- a/generated/Tier 1 Broker Scorecards/Rpk Professional Group LLC_Broker_Scorecard.pptx
+++ b/generated/Tier 1 Broker Scorecards/Rpk Professional Group LLC_Broker_Scorecard.pptx
@@ -3394,7 +3394,7 @@
                         <a:rPr sz="900">
                           <a:latin typeface="Segoe UI"/>
                         </a:rPr>
-                        <a:t>Tier 1  |  1.96% / 15.00%</a:t>
+                        <a:t>Tier 1  |  1.95% / 15.00%</a:t>
                       </a:r>
                     </a:p>
                   </a:txBody>
@@ -3766,7 +3766,7 @@
                         <a:rPr sz="900">
                           <a:latin typeface="Segoe UI"/>
                         </a:rPr>
-                        <a:t>Non-Fleet Subs: 191  |  Binds: 4</a:t>
+                        <a:t>Non-Fleet Subs: 192  |  Binds: 4</a:t>
                       </a:r>
                     </a:p>
                   </a:txBody>
@@ -4428,7 +4428,7 @@
                           </a:solidFill>
                           <a:latin typeface="Segoe UI"/>
                         </a:rPr>
-                        <a:t>38</a:t>
+                        <a:t>39</a:t>
                       </a:r>
                     </a:p>
                   </a:txBody>

--- a/generated/Tier 1 Broker Scorecards/Rpk Professional Group LLC_Broker_Scorecard.pptx
+++ b/generated/Tier 1 Broker Scorecards/Rpk Professional Group LLC_Broker_Scorecard.pptx
@@ -3394,7 +3394,7 @@
                         <a:rPr sz="900">
                           <a:latin typeface="Segoe UI"/>
                         </a:rPr>
-                        <a:t>Tier 1  |  1.95% / 15.00%</a:t>
+                        <a:t>Tier 1  |  2.42% / 15.00%</a:t>
                       </a:r>
                     </a:p>
                   </a:txBody>
@@ -3766,7 +3766,7 @@
                         <a:rPr sz="900">
                           <a:latin typeface="Segoe UI"/>
                         </a:rPr>
-                        <a:t>Non-Fleet Subs: 192  |  Binds: 4</a:t>
+                        <a:t>Non-Fleet Subs: 194  |  Binds: 5</a:t>
                       </a:r>
                     </a:p>
                   </a:txBody>
@@ -4428,7 +4428,7 @@
                           </a:solidFill>
                           <a:latin typeface="Segoe UI"/>
                         </a:rPr>
-                        <a:t>39</a:t>
+                        <a:t>41</a:t>
                       </a:r>
                     </a:p>
                   </a:txBody>

--- a/generated/Tier 1 Broker Scorecards/Rpk Professional Group LLC_Broker_Scorecard.pptx
+++ b/generated/Tier 1 Broker Scorecards/Rpk Professional Group LLC_Broker_Scorecard.pptx
@@ -3357,7 +3357,7 @@
                         <a:rPr sz="800">
                           <a:latin typeface="Segoe UI"/>
                         </a:rPr>
-                        <a:t>$1,332,358.07 / $1,126,768.34 / $147,883.87</a:t>
+                        <a:t>$1,332,358.07 / $922,221.34 / $147,883.87</a:t>
                       </a:r>
                     </a:p>
                   </a:txBody>
